--- a/data/09_internal_training/training_2.pptx
+++ b/data/09_internal_training/training_2.pptx
@@ -3140,12 +3140,29 @@
           <a:p/>
           <a:p>
             <a:r>
+              <a:t>华辰资本旗下的 HC Quant Arbitrage Fund 在最近的资产配置会议中</a:t>
+            </a:r>
+          </a:p>
+          <a:p>
+            <a:r>
+              <a:t>讨论了 消费科技 行业的投资机会，并对 联通时科传媒有限公司</a:t>
+            </a:r>
+          </a:p>
+          <a:p>
+            <a:r>
+              <a:t>进行了重点评估。</a:t>
+            </a:r>
+          </a:p>
+          <a:p/>
+          <a:p/>
+          <a:p>
+            <a:r>
               <a:t>华辰资本旗下的 HC Global Macro Fund 在最近的资产配置会议中</a:t>
             </a:r>
           </a:p>
           <a:p>
             <a:r>
-              <a:t>讨论了 新能源 行业的投资机会，并对 创汇传媒有限公司</a:t>
+              <a:t>讨论了 消费科技 行业的投资机会，并对 联通时科传媒有限公司</a:t>
             </a:r>
           </a:p>
           <a:p>
@@ -3157,34 +3174,17 @@
           <a:p/>
           <a:p>
             <a:r>
-              <a:t>风险管理部认为，云计算 行业仍然面临若干</a:t>
-            </a:r>
-          </a:p>
-          <a:p>
-            <a:r>
-              <a:t>不确定性因素，包括技术迭代风险、政策变化、</a:t>
-            </a:r>
-          </a:p>
-          <a:p>
-            <a:r>
-              <a:t>以及市场竞争加剧等问题。</a:t>
-            </a:r>
-          </a:p>
-          <a:p/>
-          <a:p/>
-          <a:p>
-            <a:r>
-              <a:t>风险管理部认为，人工智能 行业仍然面临若干</a:t>
-            </a:r>
-          </a:p>
-          <a:p>
-            <a:r>
-              <a:t>不确定性因素，包括技术迭代风险、政策变化、</a:t>
-            </a:r>
-          </a:p>
-          <a:p>
-            <a:r>
-              <a:t>以及市场竞争加剧等问题。</a:t>
+              <a:t>从产业链角度看，半导体 行业主要由上游设备厂商、</a:t>
+            </a:r>
+          </a:p>
+          <a:p>
+            <a:r>
+              <a:t>中游平台企业以及下游应用厂商组成。</a:t>
+            </a:r>
+          </a:p>
+          <a:p>
+            <a:r>
+              <a:t>华泰通安网络有限公司 主要位于产业链的 下游 环节。</a:t>
             </a:r>
           </a:p>
           <a:p/>
@@ -3246,56 +3246,51 @@
           <a:p/>
           <a:p>
             <a:r>
-              <a:t>根据内部财务模型测算，浦华众城信息有限公司 在未来三年</a:t>
-            </a:r>
-          </a:p>
-          <a:p>
-            <a:r>
-              <a:t>收入复合增长率预计可达到 13% 左右。</a:t>
-            </a:r>
-          </a:p>
-          <a:p>
-            <a:r>
-              <a:t>该预测基于行业需求增长以及公司产能扩张计划。</a:t>
-            </a:r>
-          </a:p>
-          <a:p/>
-          <a:p/>
-          <a:p>
-            <a:r>
-              <a:t>根据内部财务模型测算，艾提科信科技有限公司 在未来三年</a:t>
-            </a:r>
-          </a:p>
-          <a:p>
-            <a:r>
-              <a:t>收入复合增长率预计可达到 23% 左右。</a:t>
-            </a:r>
-          </a:p>
-          <a:p>
-            <a:r>
-              <a:t>该预测基于行业需求增长以及公司产能扩张计划。</a:t>
-            </a:r>
-          </a:p>
-          <a:p/>
-          <a:p/>
-          <a:p>
-            <a:r>
-              <a:t>九方网络有限公司 是中国 新能源 行业的重要企业之一。</a:t>
-            </a:r>
-          </a:p>
-          <a:p>
-            <a:r>
-              <a:t>根据华辰资本 资产配置委员会 的研究，该公司成立于 2009 年，</a:t>
-            </a:r>
-          </a:p>
-          <a:p>
-            <a:r>
-              <a:t>目前员工规模约 7967 人。公司近年来持续加大研发投入，</a:t>
-            </a:r>
-          </a:p>
-          <a:p>
-            <a:r>
-              <a:t>在核心技术方面形成了较强的竞争壁垒。</a:t>
+              <a:t>风险管理部认为，消费科技 行业仍然面临若干</a:t>
+            </a:r>
+          </a:p>
+          <a:p>
+            <a:r>
+              <a:t>不确定性因素，包括技术迭代风险、政策变化、</a:t>
+            </a:r>
+          </a:p>
+          <a:p>
+            <a:r>
+              <a:t>以及市场竞争加剧等问题。</a:t>
+            </a:r>
+          </a:p>
+          <a:p/>
+          <a:p/>
+          <a:p>
+            <a:r>
+              <a:t>从产业链角度看，新能源 行业主要由上游设备厂商、</a:t>
+            </a:r>
+          </a:p>
+          <a:p>
+            <a:r>
+              <a:t>中游平台企业以及下游应用厂商组成。</a:t>
+            </a:r>
+          </a:p>
+          <a:p>
+            <a:r>
+              <a:t>创汇传媒有限公司 主要位于产业链的 上游 环节。</a:t>
+            </a:r>
+          </a:p>
+          <a:p/>
+          <a:p/>
+          <a:p>
+            <a:r>
+              <a:t>从产业链角度看，人工智能 行业主要由上游设备厂商、</a:t>
+            </a:r>
+          </a:p>
+          <a:p>
+            <a:r>
+              <a:t>中游平台企业以及下游应用厂商组成。</a:t>
+            </a:r>
+          </a:p>
+          <a:p>
+            <a:r>
+              <a:t>惠派国际公司科技有限公司 主要位于产业链的 下游 环节。</a:t>
             </a:r>
           </a:p>
           <a:p/>
@@ -3357,56 +3352,51 @@
           <a:p/>
           <a:p>
             <a:r>
-              <a:t>风险管理部认为，新能源 行业仍然面临若干</a:t>
-            </a:r>
-          </a:p>
-          <a:p>
-            <a:r>
-              <a:t>不确定性因素，包括技术迭代风险、政策变化、</a:t>
-            </a:r>
-          </a:p>
-          <a:p>
-            <a:r>
-              <a:t>以及市场竞争加剧等问题。</a:t>
-            </a:r>
-          </a:p>
-          <a:p/>
-          <a:p/>
-          <a:p>
-            <a:r>
-              <a:t>易动力科技有限公司 是中国 云计算 行业的重要企业之一。</a:t>
-            </a:r>
-          </a:p>
-          <a:p>
-            <a:r>
-              <a:t>根据华辰资本 风险管理部 的研究，该公司成立于 2014 年，</a:t>
-            </a:r>
-          </a:p>
-          <a:p>
-            <a:r>
-              <a:t>目前员工规模约 1450 人。公司近年来持续加大研发投入，</a:t>
-            </a:r>
-          </a:p>
-          <a:p>
-            <a:r>
-              <a:t>在核心技术方面形成了较强的竞争壁垒。</a:t>
-            </a:r>
-          </a:p>
-          <a:p/>
-          <a:p/>
-          <a:p>
-            <a:r>
-              <a:t>从产业链角度看，人工智能 行业主要由上游设备厂商、</a:t>
-            </a:r>
-          </a:p>
-          <a:p>
-            <a:r>
-              <a:t>中游平台企业以及下游应用厂商组成。</a:t>
-            </a:r>
-          </a:p>
-          <a:p>
-            <a:r>
-              <a:t>信诚致远传媒有限公司 主要位于产业链的 中游 环节。</a:t>
+              <a:t>华辰资本旗下的 HC Quant Arbitrage Fund 在最近的资产配置会议中</a:t>
+            </a:r>
+          </a:p>
+          <a:p>
+            <a:r>
+              <a:t>讨论了 消费科技 行业的投资机会，并对 天开科技有限公司</a:t>
+            </a:r>
+          </a:p>
+          <a:p>
+            <a:r>
+              <a:t>进行了重点评估。</a:t>
+            </a:r>
+          </a:p>
+          <a:p/>
+          <a:p/>
+          <a:p>
+            <a:r>
+              <a:t>华辰资本旗下的 HC Alpha Growth Fund 在最近的资产配置会议中</a:t>
+            </a:r>
+          </a:p>
+          <a:p>
+            <a:r>
+              <a:t>讨论了 消费科技 行业的投资机会，并对 昂歌信息信息有限公司</a:t>
+            </a:r>
+          </a:p>
+          <a:p>
+            <a:r>
+              <a:t>进行了重点评估。</a:t>
+            </a:r>
+          </a:p>
+          <a:p/>
+          <a:p/>
+          <a:p>
+            <a:r>
+              <a:t>华辰资本旗下的 HC Energy Transition Fund 在最近的资产配置会议中</a:t>
+            </a:r>
+          </a:p>
+          <a:p>
+            <a:r>
+              <a:t>讨论了 云计算 行业的投资机会，并对 佳禾传媒有限公司</a:t>
+            </a:r>
+          </a:p>
+          <a:p>
+            <a:r>
+              <a:t>进行了重点评估。</a:t>
             </a:r>
           </a:p>
           <a:p/>
@@ -3468,29 +3458,7 @@
           <a:p/>
           <a:p>
             <a:r>
-              <a:t>鸿睿思博网络有限公司 是中国 新能源 行业的重要企业之一。</a:t>
-            </a:r>
-          </a:p>
-          <a:p>
-            <a:r>
-              <a:t>根据华辰资本 量化研究部 的研究，该公司成立于 2015 年，</a:t>
-            </a:r>
-          </a:p>
-          <a:p>
-            <a:r>
-              <a:t>目前员工规模约 1240 人。公司近年来持续加大研发投入，</a:t>
-            </a:r>
-          </a:p>
-          <a:p>
-            <a:r>
-              <a:t>在核心技术方面形成了较强的竞争壁垒。</a:t>
-            </a:r>
-          </a:p>
-          <a:p/>
-          <a:p/>
-          <a:p>
-            <a:r>
-              <a:t>从产业链角度看，消费科技 行业主要由上游设备厂商、</a:t>
+              <a:t>从产业链角度看，云计算 行业主要由上游设备厂商、</a:t>
             </a:r>
           </a:p>
           <a:p>
@@ -3500,24 +3468,41 @@
           </a:p>
           <a:p>
             <a:r>
-              <a:t>兰金电子网络有限公司 主要位于产业链的 上游 环节。</a:t>
-            </a:r>
-          </a:p>
-          <a:p/>
-          <a:p/>
-          <a:p>
-            <a:r>
-              <a:t>风险管理部认为，云计算 行业仍然面临若干</a:t>
-            </a:r>
-          </a:p>
-          <a:p>
-            <a:r>
-              <a:t>不确定性因素，包括技术迭代风险、政策变化、</a:t>
-            </a:r>
-          </a:p>
-          <a:p>
-            <a:r>
-              <a:t>以及市场竞争加剧等问题。</a:t>
+              <a:t>信诚致远科技有限公司 主要位于产业链的 下游 环节。</a:t>
+            </a:r>
+          </a:p>
+          <a:p/>
+          <a:p/>
+          <a:p>
+            <a:r>
+              <a:t>根据内部财务模型测算，新格林耐特网络有限公司 在未来三年</a:t>
+            </a:r>
+          </a:p>
+          <a:p>
+            <a:r>
+              <a:t>收入复合增长率预计可达到 13% 左右。</a:t>
+            </a:r>
+          </a:p>
+          <a:p>
+            <a:r>
+              <a:t>该预测基于行业需求增长以及公司产能扩张计划。</a:t>
+            </a:r>
+          </a:p>
+          <a:p/>
+          <a:p/>
+          <a:p>
+            <a:r>
+              <a:t>华辰资本旗下的 HC Quant Arbitrage Fund 在最近的资产配置会议中</a:t>
+            </a:r>
+          </a:p>
+          <a:p>
+            <a:r>
+              <a:t>讨论了 半导体 行业的投资机会，并对 雨林木风计算机科技有限公司</a:t>
+            </a:r>
+          </a:p>
+          <a:p>
+            <a:r>
+              <a:t>进行了重点评估。</a:t>
             </a:r>
           </a:p>
           <a:p/>
@@ -3579,7 +3564,7 @@
           <a:p/>
           <a:p>
             <a:r>
-              <a:t>风险管理部认为，人工智能 行业仍然面临若干</a:t>
+              <a:t>风险管理部认为，半导体 行业仍然面临若干</a:t>
             </a:r>
           </a:p>
           <a:p>
@@ -3596,39 +3581,34 @@
           <a:p/>
           <a:p>
             <a:r>
-              <a:t>风险管理部认为，半导体 行业仍然面临若干</a:t>
-            </a:r>
-          </a:p>
-          <a:p>
-            <a:r>
-              <a:t>不确定性因素，包括技术迭代风险、政策变化、</a:t>
-            </a:r>
-          </a:p>
-          <a:p>
-            <a:r>
-              <a:t>以及市场竞争加剧等问题。</a:t>
-            </a:r>
-          </a:p>
-          <a:p/>
-          <a:p/>
-          <a:p>
-            <a:r>
-              <a:t>创亿信息有限公司 是中国 医疗科技 行业的重要企业之一。</a:t>
-            </a:r>
-          </a:p>
-          <a:p>
-            <a:r>
-              <a:t>根据华辰资本 风险管理部 的研究，该公司成立于 2007 年，</a:t>
-            </a:r>
-          </a:p>
-          <a:p>
-            <a:r>
-              <a:t>目前员工规模约 7601 人。公司近年来持续加大研发投入，</a:t>
-            </a:r>
-          </a:p>
-          <a:p>
-            <a:r>
-              <a:t>在核心技术方面形成了较强的竞争壁垒。</a:t>
+              <a:t>华辰资本旗下的 HC AI Innovation Fund 在最近的资产配置会议中</a:t>
+            </a:r>
+          </a:p>
+          <a:p>
+            <a:r>
+              <a:t>讨论了 半导体 行业的投资机会，并对 联软网络有限公司</a:t>
+            </a:r>
+          </a:p>
+          <a:p>
+            <a:r>
+              <a:t>进行了重点评估。</a:t>
+            </a:r>
+          </a:p>
+          <a:p/>
+          <a:p/>
+          <a:p>
+            <a:r>
+              <a:t>华辰资本旗下的 HC AI Innovation Fund 在最近的资产配置会议中</a:t>
+            </a:r>
+          </a:p>
+          <a:p>
+            <a:r>
+              <a:t>讨论了 消费科技 行业的投资机会，并对 昂歌信息信息有限公司</a:t>
+            </a:r>
+          </a:p>
+          <a:p>
+            <a:r>
+              <a:t>进行了重点评估。</a:t>
             </a:r>
           </a:p>
           <a:p/>
@@ -3690,51 +3670,56 @@
           <a:p/>
           <a:p>
             <a:r>
-              <a:t>根据内部财务模型测算，银嘉信息有限公司 在未来三年</a:t>
-            </a:r>
-          </a:p>
-          <a:p>
-            <a:r>
-              <a:t>收入复合增长率预计可达到 16% 左右。</a:t>
-            </a:r>
-          </a:p>
-          <a:p>
-            <a:r>
-              <a:t>该预测基于行业需求增长以及公司产能扩张计划。</a:t>
-            </a:r>
-          </a:p>
-          <a:p/>
-          <a:p/>
-          <a:p>
-            <a:r>
-              <a:t>根据内部财务模型测算，鸿睿思博信息有限公司 在未来三年</a:t>
-            </a:r>
-          </a:p>
-          <a:p>
-            <a:r>
-              <a:t>收入复合增长率预计可达到 25% 左右。</a:t>
-            </a:r>
-          </a:p>
-          <a:p>
-            <a:r>
-              <a:t>该预测基于行业需求增长以及公司产能扩张计划。</a:t>
-            </a:r>
-          </a:p>
-          <a:p/>
-          <a:p/>
-          <a:p>
-            <a:r>
-              <a:t>根据内部财务模型测算，凌云网络有限公司 在未来三年</a:t>
-            </a:r>
-          </a:p>
-          <a:p>
-            <a:r>
-              <a:t>收入复合增长率预计可达到 22% 左右。</a:t>
-            </a:r>
-          </a:p>
-          <a:p>
-            <a:r>
-              <a:t>该预测基于行业需求增长以及公司产能扩张计划。</a:t>
+              <a:t>华成育卓传媒有限公司 是中国 人工智能 行业的重要企业之一。</a:t>
+            </a:r>
+          </a:p>
+          <a:p>
+            <a:r>
+              <a:t>根据华辰资本 量化研究部 的研究，该公司成立于 2006 年，</a:t>
+            </a:r>
+          </a:p>
+          <a:p>
+            <a:r>
+              <a:t>目前员工规模约 7579 人。公司近年来持续加大研发投入，</a:t>
+            </a:r>
+          </a:p>
+          <a:p>
+            <a:r>
+              <a:t>在核心技术方面形成了较强的竞争壁垒。</a:t>
+            </a:r>
+          </a:p>
+          <a:p/>
+          <a:p/>
+          <a:p>
+            <a:r>
+              <a:t>风险管理部认为，人工智能 行业仍然面临若干</a:t>
+            </a:r>
+          </a:p>
+          <a:p>
+            <a:r>
+              <a:t>不确定性因素，包括技术迭代风险、政策变化、</a:t>
+            </a:r>
+          </a:p>
+          <a:p>
+            <a:r>
+              <a:t>以及市场竞争加剧等问题。</a:t>
+            </a:r>
+          </a:p>
+          <a:p/>
+          <a:p/>
+          <a:p>
+            <a:r>
+              <a:t>华辰资本旗下的 HC Quant Arbitrage Fund 在最近的资产配置会议中</a:t>
+            </a:r>
+          </a:p>
+          <a:p>
+            <a:r>
+              <a:t>讨论了 医疗科技 行业的投资机会，并对 昊嘉科技有限公司</a:t>
+            </a:r>
+          </a:p>
+          <a:p>
+            <a:r>
+              <a:t>进行了重点评估。</a:t>
             </a:r>
           </a:p>
           <a:p/>
@@ -3796,34 +3781,12 @@
           <a:p/>
           <a:p>
             <a:r>
-              <a:t>万迅电脑网络有限公司 是中国 半导体 行业的重要企业之一。</a:t>
-            </a:r>
-          </a:p>
-          <a:p>
-            <a:r>
-              <a:t>根据华辰资本 资产配置委员会 的研究，该公司成立于 2019 年，</a:t>
-            </a:r>
-          </a:p>
-          <a:p>
-            <a:r>
-              <a:t>目前员工规模约 7385 人。公司近年来持续加大研发投入，</a:t>
-            </a:r>
-          </a:p>
-          <a:p>
-            <a:r>
-              <a:t>在核心技术方面形成了较强的竞争壁垒。</a:t>
-            </a:r>
-          </a:p>
-          <a:p/>
-          <a:p/>
-          <a:p>
-            <a:r>
-              <a:t>华辰资本旗下的 HC Alpha Growth Fund 在最近的资产配置会议中</a:t>
-            </a:r>
-          </a:p>
-          <a:p>
-            <a:r>
-              <a:t>讨论了 云计算 行业的投资机会，并对 创亿网络有限公司</a:t>
+              <a:t>华辰资本旗下的 HC Quant Arbitrage Fund 在最近的资产配置会议中</a:t>
+            </a:r>
+          </a:p>
+          <a:p>
+            <a:r>
+              <a:t>讨论了 人工智能 行业的投资机会，并对 惠派国际公司科技有限公司</a:t>
             </a:r>
           </a:p>
           <a:p>
@@ -3835,17 +3798,34 @@
           <a:p/>
           <a:p>
             <a:r>
-              <a:t>华辰资本旗下的 HC Alpha Growth Fund 在最近的资产配置会议中</a:t>
-            </a:r>
-          </a:p>
-          <a:p>
-            <a:r>
-              <a:t>讨论了 医疗科技 行业的投资机会，并对 雨林木风计算机网络有限公司</a:t>
-            </a:r>
-          </a:p>
-          <a:p>
-            <a:r>
-              <a:t>进行了重点评估。</a:t>
+              <a:t>从产业链角度看，半导体 行业主要由上游设备厂商、</a:t>
+            </a:r>
+          </a:p>
+          <a:p>
+            <a:r>
+              <a:t>中游平台企业以及下游应用厂商组成。</a:t>
+            </a:r>
+          </a:p>
+          <a:p>
+            <a:r>
+              <a:t>联软网络有限公司 主要位于产业链的 中游 环节。</a:t>
+            </a:r>
+          </a:p>
+          <a:p/>
+          <a:p/>
+          <a:p>
+            <a:r>
+              <a:t>风险管理部认为，新能源 行业仍然面临若干</a:t>
+            </a:r>
+          </a:p>
+          <a:p>
+            <a:r>
+              <a:t>不确定性因素，包括技术迭代风险、政策变化、</a:t>
+            </a:r>
+          </a:p>
+          <a:p>
+            <a:r>
+              <a:t>以及市场竞争加剧等问题。</a:t>
             </a:r>
           </a:p>
           <a:p/>
@@ -3907,56 +3887,51 @@
           <a:p/>
           <a:p>
             <a:r>
-              <a:t>华辰资本旗下的 HC Energy Transition Fund 在最近的资产配置会议中</a:t>
-            </a:r>
-          </a:p>
-          <a:p>
-            <a:r>
-              <a:t>讨论了 医疗科技 行业的投资机会，并对 创亿信息有限公司</a:t>
-            </a:r>
-          </a:p>
-          <a:p>
-            <a:r>
-              <a:t>进行了重点评估。</a:t>
-            </a:r>
-          </a:p>
-          <a:p/>
-          <a:p/>
-          <a:p>
-            <a:r>
-              <a:t>华辰资本旗下的 HC Quant Arbitrage Fund 在最近的资产配置会议中</a:t>
-            </a:r>
-          </a:p>
-          <a:p>
-            <a:r>
-              <a:t>讨论了 半导体 行业的投资机会，并对 浦华众城科技有限公司</a:t>
-            </a:r>
-          </a:p>
-          <a:p>
-            <a:r>
-              <a:t>进行了重点评估。</a:t>
-            </a:r>
-          </a:p>
-          <a:p/>
-          <a:p/>
-          <a:p>
-            <a:r>
-              <a:t>创亿网络有限公司 是中国 云计算 行业的重要企业之一。</a:t>
-            </a:r>
-          </a:p>
-          <a:p>
-            <a:r>
-              <a:t>根据华辰资本 资产配置委员会 的研究，该公司成立于 2010 年，</a:t>
-            </a:r>
-          </a:p>
-          <a:p>
-            <a:r>
-              <a:t>目前员工规模约 4041 人。公司近年来持续加大研发投入，</a:t>
-            </a:r>
-          </a:p>
-          <a:p>
-            <a:r>
-              <a:t>在核心技术方面形成了较强的竞争壁垒。</a:t>
+              <a:t>风险管理部认为，消费科技 行业仍然面临若干</a:t>
+            </a:r>
+          </a:p>
+          <a:p>
+            <a:r>
+              <a:t>不确定性因素，包括技术迭代风险、政策变化、</a:t>
+            </a:r>
+          </a:p>
+          <a:p>
+            <a:r>
+              <a:t>以及市场竞争加剧等问题。</a:t>
+            </a:r>
+          </a:p>
+          <a:p/>
+          <a:p/>
+          <a:p>
+            <a:r>
+              <a:t>从产业链角度看，半导体 行业主要由上游设备厂商、</a:t>
+            </a:r>
+          </a:p>
+          <a:p>
+            <a:r>
+              <a:t>中游平台企业以及下游应用厂商组成。</a:t>
+            </a:r>
+          </a:p>
+          <a:p>
+            <a:r>
+              <a:t>联软网络有限公司 主要位于产业链的 下游 环节。</a:t>
+            </a:r>
+          </a:p>
+          <a:p/>
+          <a:p/>
+          <a:p>
+            <a:r>
+              <a:t>从产业链角度看，云计算 行业主要由上游设备厂商、</a:t>
+            </a:r>
+          </a:p>
+          <a:p>
+            <a:r>
+              <a:t>中游平台企业以及下游应用厂商组成。</a:t>
+            </a:r>
+          </a:p>
+          <a:p>
+            <a:r>
+              <a:t>佳禾传媒有限公司 主要位于产业链的 上游 环节。</a:t>
             </a:r>
           </a:p>
           <a:p/>
@@ -4018,39 +3993,17 @@
           <a:p/>
           <a:p>
             <a:r>
-              <a:t>根据内部财务模型测算，万迅电脑网络有限公司 在未来三年</a:t>
-            </a:r>
-          </a:p>
-          <a:p>
-            <a:r>
-              <a:t>收入复合增长率预计可达到 28% 左右。</a:t>
-            </a:r>
-          </a:p>
-          <a:p>
-            <a:r>
-              <a:t>该预测基于行业需求增长以及公司产能扩张计划。</a:t>
-            </a:r>
-          </a:p>
-          <a:p/>
-          <a:p/>
-          <a:p>
-            <a:r>
-              <a:t>雨林木风计算机网络有限公司 是中国 医疗科技 行业的重要企业之一。</a:t>
-            </a:r>
-          </a:p>
-          <a:p>
-            <a:r>
-              <a:t>根据华辰资本 投资策略部 的研究，该公司成立于 2012 年，</a:t>
-            </a:r>
-          </a:p>
-          <a:p>
-            <a:r>
-              <a:t>目前员工规模约 1948 人。公司近年来持续加大研发投入，</a:t>
-            </a:r>
-          </a:p>
-          <a:p>
-            <a:r>
-              <a:t>在核心技术方面形成了较强的竞争壁垒。</a:t>
+              <a:t>华辰资本旗下的 HC Quant Arbitrage Fund 在最近的资产配置会议中</a:t>
+            </a:r>
+          </a:p>
+          <a:p>
+            <a:r>
+              <a:t>讨论了 云计算 行业的投资机会，并对 泰麒麟网络有限公司</a:t>
+            </a:r>
+          </a:p>
+          <a:p>
+            <a:r>
+              <a:t>进行了重点评估。</a:t>
             </a:r>
           </a:p>
           <a:p/>
@@ -4068,6 +4021,23 @@
           <a:p>
             <a:r>
               <a:t>以及市场竞争加剧等问题。</a:t>
+            </a:r>
+          </a:p>
+          <a:p/>
+          <a:p/>
+          <a:p>
+            <a:r>
+              <a:t>从产业链角度看，机器人 行业主要由上游设备厂商、</a:t>
+            </a:r>
+          </a:p>
+          <a:p>
+            <a:r>
+              <a:t>中游平台企业以及下游应用厂商组成。</a:t>
+            </a:r>
+          </a:p>
+          <a:p>
+            <a:r>
+              <a:t>毕博诚信息有限公司 主要位于产业链的 下游 环节。</a:t>
             </a:r>
           </a:p>
           <a:p/>
@@ -4129,56 +4099,56 @@
           <a:p/>
           <a:p>
             <a:r>
-              <a:t>根据内部财务模型测算，立信电子网络有限公司 在未来三年</a:t>
-            </a:r>
-          </a:p>
-          <a:p>
-            <a:r>
-              <a:t>收入复合增长率预计可达到 33% 左右。</a:t>
-            </a:r>
-          </a:p>
-          <a:p>
-            <a:r>
-              <a:t>该预测基于行业需求增长以及公司产能扩张计划。</a:t>
-            </a:r>
-          </a:p>
-          <a:p/>
-          <a:p/>
-          <a:p>
-            <a:r>
-              <a:t>浦华众城信息有限公司 是中国 云计算 行业的重要企业之一。</a:t>
-            </a:r>
-          </a:p>
-          <a:p>
-            <a:r>
-              <a:t>根据华辰资本 风险管理部 的研究，该公司成立于 2015 年，</a:t>
-            </a:r>
-          </a:p>
-          <a:p>
-            <a:r>
-              <a:t>目前员工规模约 2962 人。公司近年来持续加大研发投入，</a:t>
+              <a:t>从产业链角度看，云计算 行业主要由上游设备厂商、</a:t>
+            </a:r>
+          </a:p>
+          <a:p>
+            <a:r>
+              <a:t>中游平台企业以及下游应用厂商组成。</a:t>
+            </a:r>
+          </a:p>
+          <a:p>
+            <a:r>
+              <a:t>良诺科技有限公司 主要位于产业链的 上游 环节。</a:t>
+            </a:r>
+          </a:p>
+          <a:p/>
+          <a:p/>
+          <a:p>
+            <a:r>
+              <a:t>从产业链角度看，人工智能 行业主要由上游设备厂商、</a:t>
+            </a:r>
+          </a:p>
+          <a:p>
+            <a:r>
+              <a:t>中游平台企业以及下游应用厂商组成。</a:t>
+            </a:r>
+          </a:p>
+          <a:p>
+            <a:r>
+              <a:t>华成育卓传媒有限公司 主要位于产业链的 中游 环节。</a:t>
+            </a:r>
+          </a:p>
+          <a:p/>
+          <a:p/>
+          <a:p>
+            <a:r>
+              <a:t>佳禾传媒有限公司 是中国 云计算 行业的重要企业之一。</a:t>
+            </a:r>
+          </a:p>
+          <a:p>
+            <a:r>
+              <a:t>根据华辰资本 风险管理部 的研究，该公司成立于 2016 年，</a:t>
+            </a:r>
+          </a:p>
+          <a:p>
+            <a:r>
+              <a:t>目前员工规模约 3802 人。公司近年来持续加大研发投入，</a:t>
             </a:r>
           </a:p>
           <a:p>
             <a:r>
               <a:t>在核心技术方面形成了较强的竞争壁垒。</a:t>
-            </a:r>
-          </a:p>
-          <a:p/>
-          <a:p/>
-          <a:p>
-            <a:r>
-              <a:t>从产业链角度看，半导体 行业主要由上游设备厂商、</a:t>
-            </a:r>
-          </a:p>
-          <a:p>
-            <a:r>
-              <a:t>中游平台企业以及下游应用厂商组成。</a:t>
-            </a:r>
-          </a:p>
-          <a:p>
-            <a:r>
-              <a:t>万迅电脑网络有限公司 主要位于产业链的 下游 环节。</a:t>
             </a:r>
           </a:p>
           <a:p/>
@@ -4240,29 +4210,34 @@
           <a:p/>
           <a:p>
             <a:r>
-              <a:t>从产业链角度看，医疗科技 行业主要由上游设备厂商、</a:t>
-            </a:r>
-          </a:p>
-          <a:p>
-            <a:r>
-              <a:t>中游平台企业以及下游应用厂商组成。</a:t>
-            </a:r>
-          </a:p>
-          <a:p>
-            <a:r>
-              <a:t>雨林木风计算机网络有限公司 主要位于产业链的 下游 环节。</a:t>
-            </a:r>
-          </a:p>
-          <a:p/>
-          <a:p/>
-          <a:p>
-            <a:r>
-              <a:t>华辰资本旗下的 HC AI Innovation Fund 在最近的资产配置会议中</a:t>
-            </a:r>
-          </a:p>
-          <a:p>
-            <a:r>
-              <a:t>讨论了 云计算 行业的投资机会，并对 精芯科技有限公司</a:t>
+              <a:t>佳禾传媒有限公司 是中国 云计算 行业的重要企业之一。</a:t>
+            </a:r>
+          </a:p>
+          <a:p>
+            <a:r>
+              <a:t>根据华辰资本 投资委员会 的研究，该公司成立于 2016 年，</a:t>
+            </a:r>
+          </a:p>
+          <a:p>
+            <a:r>
+              <a:t>目前员工规模约 3802 人。公司近年来持续加大研发投入，</a:t>
+            </a:r>
+          </a:p>
+          <a:p>
+            <a:r>
+              <a:t>在核心技术方面形成了较强的竞争壁垒。</a:t>
+            </a:r>
+          </a:p>
+          <a:p/>
+          <a:p/>
+          <a:p>
+            <a:r>
+              <a:t>华辰资本旗下的 HC Energy Transition Fund 在最近的资产配置会议中</a:t>
+            </a:r>
+          </a:p>
+          <a:p>
+            <a:r>
+              <a:t>讨论了 半导体 行业的投资机会，并对 中建创业科技有限公司</a:t>
             </a:r>
           </a:p>
           <a:p>
@@ -4274,17 +4249,17 @@
           <a:p/>
           <a:p>
             <a:r>
-              <a:t>华辰资本旗下的 HC Quant Arbitrage Fund 在最近的资产配置会议中</a:t>
-            </a:r>
-          </a:p>
-          <a:p>
-            <a:r>
-              <a:t>讨论了 新能源 行业的投资机会，并对 快讯网络有限公司</a:t>
-            </a:r>
-          </a:p>
-          <a:p>
-            <a:r>
-              <a:t>进行了重点评估。</a:t>
+              <a:t>根据内部财务模型测算，方正科技信息有限公司 在未来三年</a:t>
+            </a:r>
+          </a:p>
+          <a:p>
+            <a:r>
+              <a:t>收入复合增长率预计可达到 21% 左右。</a:t>
+            </a:r>
+          </a:p>
+          <a:p>
+            <a:r>
+              <a:t>该预测基于行业需求增长以及公司产能扩张计划。</a:t>
             </a:r>
           </a:p>
           <a:p/>
@@ -4346,46 +4321,56 @@
           <a:p/>
           <a:p>
             <a:r>
-              <a:t>华辰资本旗下的 HC AI Innovation Fund 在最近的资产配置会议中</a:t>
-            </a:r>
-          </a:p>
-          <a:p>
-            <a:r>
-              <a:t>讨论了 消费科技 行业的投资机会，并对 精芯信息有限公司</a:t>
-            </a:r>
-          </a:p>
-          <a:p>
-            <a:r>
-              <a:t>进行了重点评估。</a:t>
-            </a:r>
-          </a:p>
-          <a:p/>
-          <a:p/>
-          <a:p>
-            <a:r>
-              <a:t>华辰资本旗下的 HC Energy Transition Fund 在最近的资产配置会议中</a:t>
-            </a:r>
-          </a:p>
-          <a:p>
-            <a:r>
-              <a:t>讨论了 云计算 行业的投资机会，并对 天益信息有限公司</a:t>
-            </a:r>
-          </a:p>
-          <a:p>
-            <a:r>
-              <a:t>进行了重点评估。</a:t>
-            </a:r>
-          </a:p>
-          <a:p/>
-          <a:p/>
-          <a:p>
-            <a:r>
-              <a:t>根据内部财务模型测算，东方峻景传媒有限公司 在未来三年</a:t>
-            </a:r>
-          </a:p>
-          <a:p>
-            <a:r>
-              <a:t>收入复合增长率预计可达到 26% 左右。</a:t>
+              <a:t>戴硕电子网络有限公司 是中国 新能源 行业的重要企业之一。</a:t>
+            </a:r>
+          </a:p>
+          <a:p>
+            <a:r>
+              <a:t>根据华辰资本 投资委员会 的研究，该公司成立于 2016 年，</a:t>
+            </a:r>
+          </a:p>
+          <a:p>
+            <a:r>
+              <a:t>目前员工规模约 2243 人。公司近年来持续加大研发投入，</a:t>
+            </a:r>
+          </a:p>
+          <a:p>
+            <a:r>
+              <a:t>在核心技术方面形成了较强的竞争壁垒。</a:t>
+            </a:r>
+          </a:p>
+          <a:p/>
+          <a:p/>
+          <a:p>
+            <a:r>
+              <a:t>鑫博腾飞信息有限公司 是中国 消费科技 行业的重要企业之一。</a:t>
+            </a:r>
+          </a:p>
+          <a:p>
+            <a:r>
+              <a:t>根据华辰资本 投资策略部 的研究，该公司成立于 2016 年，</a:t>
+            </a:r>
+          </a:p>
+          <a:p>
+            <a:r>
+              <a:t>目前员工规模约 4167 人。公司近年来持续加大研发投入，</a:t>
+            </a:r>
+          </a:p>
+          <a:p>
+            <a:r>
+              <a:t>在核心技术方面形成了较强的竞争壁垒。</a:t>
+            </a:r>
+          </a:p>
+          <a:p/>
+          <a:p/>
+          <a:p>
+            <a:r>
+              <a:t>根据内部财务模型测算，联通时科传媒有限公司 在未来三年</a:t>
+            </a:r>
+          </a:p>
+          <a:p>
+            <a:r>
+              <a:t>收入复合增长率预计可达到 32% 左右。</a:t>
             </a:r>
           </a:p>
           <a:p>
@@ -4452,51 +4437,56 @@
           <a:p/>
           <a:p>
             <a:r>
-              <a:t>华辰资本旗下的 HC Alpha Growth Fund 在最近的资产配置会议中</a:t>
-            </a:r>
-          </a:p>
-          <a:p>
-            <a:r>
-              <a:t>讨论了 医疗科技 行业的投资机会，并对 雨林木风计算机网络有限公司</a:t>
-            </a:r>
-          </a:p>
-          <a:p>
-            <a:r>
-              <a:t>进行了重点评估。</a:t>
-            </a:r>
-          </a:p>
-          <a:p/>
-          <a:p/>
-          <a:p>
-            <a:r>
-              <a:t>风险管理部认为，半导体 行业仍然面临若干</a:t>
-            </a:r>
-          </a:p>
-          <a:p>
-            <a:r>
-              <a:t>不确定性因素，包括技术迭代风险、政策变化、</a:t>
-            </a:r>
-          </a:p>
-          <a:p>
-            <a:r>
-              <a:t>以及市场竞争加剧等问题。</a:t>
-            </a:r>
-          </a:p>
-          <a:p/>
-          <a:p/>
-          <a:p>
-            <a:r>
-              <a:t>风险管理部认为，消费科技 行业仍然面临若干</a:t>
-            </a:r>
-          </a:p>
-          <a:p>
-            <a:r>
-              <a:t>不确定性因素，包括技术迭代风险、政策变化、</a:t>
-            </a:r>
-          </a:p>
-          <a:p>
-            <a:r>
-              <a:t>以及市场竞争加剧等问题。</a:t>
+              <a:t>新格林耐特网络有限公司 是中国 人工智能 行业的重要企业之一。</a:t>
+            </a:r>
+          </a:p>
+          <a:p>
+            <a:r>
+              <a:t>根据华辰资本 资产配置委员会 的研究，该公司成立于 2016 年，</a:t>
+            </a:r>
+          </a:p>
+          <a:p>
+            <a:r>
+              <a:t>目前员工规模约 5006 人。公司近年来持续加大研发投入，</a:t>
+            </a:r>
+          </a:p>
+          <a:p>
+            <a:r>
+              <a:t>在核心技术方面形成了较强的竞争壁垒。</a:t>
+            </a:r>
+          </a:p>
+          <a:p/>
+          <a:p/>
+          <a:p>
+            <a:r>
+              <a:t>根据内部财务模型测算，巨奥传媒有限公司 在未来三年</a:t>
+            </a:r>
+          </a:p>
+          <a:p>
+            <a:r>
+              <a:t>收入复合增长率预计可达到 34% 左右。</a:t>
+            </a:r>
+          </a:p>
+          <a:p>
+            <a:r>
+              <a:t>该预测基于行业需求增长以及公司产能扩张计划。</a:t>
+            </a:r>
+          </a:p>
+          <a:p/>
+          <a:p/>
+          <a:p>
+            <a:r>
+              <a:t>从产业链角度看，新能源 行业主要由上游设备厂商、</a:t>
+            </a:r>
+          </a:p>
+          <a:p>
+            <a:r>
+              <a:t>中游平台企业以及下游应用厂商组成。</a:t>
+            </a:r>
+          </a:p>
+          <a:p>
+            <a:r>
+              <a:t>恩悌网络有限公司 主要位于产业链的 下游 环节。</a:t>
             </a:r>
           </a:p>
           <a:p/>
@@ -4558,29 +4548,41 @@
           <a:p/>
           <a:p>
             <a:r>
-              <a:t>鸿睿思博网络有限公司 是中国 新能源 行业的重要企业之一。</a:t>
-            </a:r>
-          </a:p>
-          <a:p>
-            <a:r>
-              <a:t>根据华辰资本 投资策略部 的研究，该公司成立于 2015 年，</a:t>
-            </a:r>
-          </a:p>
-          <a:p>
-            <a:r>
-              <a:t>目前员工规模约 1240 人。公司近年来持续加大研发投入，</a:t>
-            </a:r>
-          </a:p>
-          <a:p>
-            <a:r>
-              <a:t>在核心技术方面形成了较强的竞争壁垒。</a:t>
-            </a:r>
-          </a:p>
-          <a:p/>
-          <a:p/>
-          <a:p>
-            <a:r>
-              <a:t>风险管理部认为，消费科技 行业仍然面临若干</a:t>
+              <a:t>华辰资本旗下的 HC Energy Transition Fund 在最近的资产配置会议中</a:t>
+            </a:r>
+          </a:p>
+          <a:p>
+            <a:r>
+              <a:t>讨论了 医疗科技 行业的投资机会，并对 华成育卓科技有限公司</a:t>
+            </a:r>
+          </a:p>
+          <a:p>
+            <a:r>
+              <a:t>进行了重点评估。</a:t>
+            </a:r>
+          </a:p>
+          <a:p/>
+          <a:p/>
+          <a:p>
+            <a:r>
+              <a:t>根据内部财务模型测算，信诚致远网络有限公司 在未来三年</a:t>
+            </a:r>
+          </a:p>
+          <a:p>
+            <a:r>
+              <a:t>收入复合增长率预计可达到 35% 左右。</a:t>
+            </a:r>
+          </a:p>
+          <a:p>
+            <a:r>
+              <a:t>该预测基于行业需求增长以及公司产能扩张计划。</a:t>
+            </a:r>
+          </a:p>
+          <a:p/>
+          <a:p/>
+          <a:p>
+            <a:r>
+              <a:t>风险管理部认为，机器人 行业仍然面临若干</a:t>
             </a:r>
           </a:p>
           <a:p>
@@ -4591,23 +4593,6 @@
           <a:p>
             <a:r>
               <a:t>以及市场竞争加剧等问题。</a:t>
-            </a:r>
-          </a:p>
-          <a:p/>
-          <a:p/>
-          <a:p>
-            <a:r>
-              <a:t>从产业链角度看，云计算 行业主要由上游设备厂商、</a:t>
-            </a:r>
-          </a:p>
-          <a:p>
-            <a:r>
-              <a:t>中游平台企业以及下游应用厂商组成。</a:t>
-            </a:r>
-          </a:p>
-          <a:p>
-            <a:r>
-              <a:t>创亿网络有限公司 主要位于产业链的 中游 环节。</a:t>
             </a:r>
           </a:p>
           <a:p/>
@@ -4669,51 +4654,51 @@
           <a:p/>
           <a:p>
             <a:r>
-              <a:t>根据内部财务模型测算，佳禾科技有限公司 在未来三年</a:t>
-            </a:r>
-          </a:p>
-          <a:p>
-            <a:r>
-              <a:t>收入复合增长率预计可达到 30% 左右。</a:t>
-            </a:r>
-          </a:p>
-          <a:p>
-            <a:r>
-              <a:t>该预测基于行业需求增长以及公司产能扩张计划。</a:t>
-            </a:r>
-          </a:p>
-          <a:p/>
-          <a:p/>
-          <a:p>
-            <a:r>
-              <a:t>华辰资本旗下的 HC Global Macro Fund 在最近的资产配置会议中</a:t>
-            </a:r>
-          </a:p>
-          <a:p>
-            <a:r>
-              <a:t>讨论了 人工智能 行业的投资机会，并对 雨林木风计算机科技有限公司</a:t>
-            </a:r>
-          </a:p>
-          <a:p>
-            <a:r>
-              <a:t>进行了重点评估。</a:t>
-            </a:r>
-          </a:p>
-          <a:p/>
-          <a:p/>
-          <a:p>
-            <a:r>
-              <a:t>根据内部财务模型测算，九方信息有限公司 在未来三年</a:t>
-            </a:r>
-          </a:p>
-          <a:p>
-            <a:r>
-              <a:t>收入复合增长率预计可达到 12% 左右。</a:t>
-            </a:r>
-          </a:p>
-          <a:p>
-            <a:r>
-              <a:t>该预测基于行业需求增长以及公司产能扩张计划。</a:t>
+              <a:t>从产业链角度看，机器人 行业主要由上游设备厂商、</a:t>
+            </a:r>
+          </a:p>
+          <a:p>
+            <a:r>
+              <a:t>中游平台企业以及下游应用厂商组成。</a:t>
+            </a:r>
+          </a:p>
+          <a:p>
+            <a:r>
+              <a:t>毕博诚信息有限公司 主要位于产业链的 上游 环节。</a:t>
+            </a:r>
+          </a:p>
+          <a:p/>
+          <a:p/>
+          <a:p>
+            <a:r>
+              <a:t>风险管理部认为，新能源 行业仍然面临若干</a:t>
+            </a:r>
+          </a:p>
+          <a:p>
+            <a:r>
+              <a:t>不确定性因素，包括技术迭代风险、政策变化、</a:t>
+            </a:r>
+          </a:p>
+          <a:p>
+            <a:r>
+              <a:t>以及市场竞争加剧等问题。</a:t>
+            </a:r>
+          </a:p>
+          <a:p/>
+          <a:p/>
+          <a:p>
+            <a:r>
+              <a:t>从产业链角度看，云计算 行业主要由上游设备厂商、</a:t>
+            </a:r>
+          </a:p>
+          <a:p>
+            <a:r>
+              <a:t>中游平台企业以及下游应用厂商组成。</a:t>
+            </a:r>
+          </a:p>
+          <a:p>
+            <a:r>
+              <a:t>佳禾传媒有限公司 主要位于产业链的 上游 环节。</a:t>
             </a:r>
           </a:p>
           <a:p/>
